--- a/public/fun/pack/pptx/weddingpro/결혼식프리미엄_23_식순중심_터콰이즈골드.pptx
+++ b/public/fun/pack/pptx/weddingpro/결혼식프리미엄_23_식순중심_터콰이즈골드.pptx
@@ -113,12 +113,12 @@
   <p:extLst>
     <p:ext uri="{521415D9-36F7-43E2-AB2F-B90AF26B5E84}">
       <p14:sectionLst xmlns:p14="http://schemas.microsoft.com/office/powerpoint/2010/main">
-        <p14:section name="시작" id="{F1976CE2-20BF-463F-B4A5-6B360FA434AD}">
+        <p14:section name="시작" id="{2DB087B3-9BBD-43D5-9CD9-89962CEEDDC8}">
           <p14:sldIdLst>
             <p14:sldId id="256"/>
           </p14:sldIdLst>
         </p14:section>
-        <p14:section name="본문" id="{88E743DB-C1B5-4E36-AB70-E9B0B8038F63}">
+        <p14:section name="본문" id="{5E429F5F-3C6B-43F9-8F65-C92E0EA58E65}">
           <p14:sldIdLst>
             <p14:sldId id="257"/>
             <p14:sldId id="258"/>
@@ -127,7 +127,7 @@
             <p14:sldId id="261"/>
           </p14:sldIdLst>
         </p14:section>
-        <p14:section name="마무리" id="{DE129FC9-94F2-4065-B238-FFD97C04E372}">
+        <p14:section name="마무리" id="{32BB8A44-00FD-4F98-9102-5DF39D8A4DE8}">
           <p14:sldIdLst>
             <p14:sldId id="262"/>
           </p14:sldIdLst>
@@ -1613,7 +1613,7 @@
             </a:lvl1pPr>
           </a:lstStyle>
           <a:p>
-            <a:fld id="{80BEFF24-9EAA-47E8-A94D-81CDD42B5626}" type="slidenum">
+            <a:fld id="{827C273A-2904-4466-A881-3A7573D575BD}" type="slidenum">
               <a:rPr lang="en-US"/>
               <a:t>‹#›</a:t>
             </a:fld>
@@ -2445,7 +2445,7 @@
             </a:lvl1pPr>
           </a:lstStyle>
           <a:p>
-            <a:fld id="{A7CEE307-2C4E-441F-BFFD-881B47766078}" type="slidenum">
+            <a:fld id="{B461AD75-2D24-463C-A000-91A888DA6651}" type="slidenum">
               <a:rPr lang="en-US"/>
               <a:t>‹#›</a:t>
             </a:fld>
@@ -3198,7 +3198,7 @@
             </a:lvl1pPr>
           </a:lstStyle>
           <a:p>
-            <a:fld id="{1BD31666-E444-4659-9DB1-043E4A10AE81}" type="slidenum">
+            <a:fld id="{D20220D1-D1C4-4149-A876-36BDE1469BF4}" type="slidenum">
               <a:rPr lang="en-US"/>
               <a:t>‹#›</a:t>
             </a:fld>
@@ -4181,7 +4181,7 @@
           <a:p>
             <a:r>
               <a:rPr lang="ko-KR"/>
-              <a:t>0000. 00. 00 · 예식장 이름</a:t>
+              <a:t>날짜 입력 · 예식장 이름</a:t>
             </a:r>
           </a:p>
         </p:txBody>
@@ -4404,7 +4404,7 @@
           <a:bodyPr/>
           <a:lstStyle/>
           <a:p>
-            <a:fld id="{C2158A6E-F782-4629-A578-99274C4877B2}" type="slidenum">
+            <a:fld id="{557199F8-A90D-4046-B535-1E23CBFC3B1B}" type="slidenum">
               <a:rPr lang="en-US"/>
               <a:t>‹#›</a:t>
             </a:fld>
@@ -4806,7 +4806,7 @@
           <a:bodyPr/>
           <a:lstStyle/>
           <a:p>
-            <a:fld id="{15F57DB9-C841-4CC9-A8C5-65AC8E6987AE}" type="slidenum">
+            <a:fld id="{0AEC2E9B-FCC5-4AE9-9D39-9A47745C0F8B}" type="slidenum">
               <a:rPr lang="en-US"/>
               <a:t>‹#›</a:t>
             </a:fld>
@@ -5635,7 +5635,7 @@
           <a:bodyPr/>
           <a:lstStyle/>
           <a:p>
-            <a:fld id="{1BCDF6B6-0FF2-4DA7-839D-923039FC49B5}" type="slidenum">
+            <a:fld id="{F61A8DF4-303D-40AA-9B0B-3B2CA83D1461}" type="slidenum">
               <a:rPr lang="en-US"/>
               <a:t>‹#›</a:t>
             </a:fld>
@@ -6899,7 +6899,7 @@
           <a:bodyPr/>
           <a:lstStyle/>
           <a:p>
-            <a:fld id="{5962B2BA-9228-4A13-86CB-DF2EEDF0219E}" type="slidenum">
+            <a:fld id="{03F59042-ED0D-4576-A5AA-7D040B80B4C5}" type="slidenum">
               <a:rPr lang="en-US"/>
               <a:t>‹#›</a:t>
             </a:fld>
@@ -6987,7 +6987,7 @@
           <a:bodyPr/>
           <a:lstStyle/>
           <a:p>
-            <a:fld id="{065B407A-950A-4088-8B76-7C2EC5A459FF}" type="slidenum">
+            <a:fld id="{34662369-1E88-4BA8-B73E-E30D1276E72E}" type="slidenum">
               <a:rPr lang="en-US"/>
               <a:t>‹#›</a:t>
             </a:fld>
